--- a/我的心你要稱頌耶和華(崇拜版).pptx
+++ b/我的心你要稱頌耶和華(崇拜版).pptx
@@ -169,10 +169,9 @@
           <a:lstStyle/>
           <a:p>
             <a:r>
-              <a:rPr lang="zh-TW" altLang="en-US" smtClean="0"/>
+              <a:rPr lang="zh-TW" altLang="en-US"/>
               <a:t>按一下以編輯母片標題樣式</a:t>
             </a:r>
-            <a:endParaRPr lang="zh-TW" altLang="en-US"/>
           </a:p>
         </p:txBody>
       </p:sp>
@@ -288,10 +287,9 @@
           </a:lstStyle>
           <a:p>
             <a:r>
-              <a:rPr lang="zh-TW" altLang="en-US" smtClean="0"/>
+              <a:rPr lang="zh-TW" altLang="en-US"/>
               <a:t>按一下以編輯母片副標題樣式</a:t>
             </a:r>
-            <a:endParaRPr lang="zh-TW" altLang="en-US"/>
           </a:p>
         </p:txBody>
       </p:sp>
@@ -313,7 +311,7 @@
             <a:fld id="{9CEA959E-6A41-412C-8C82-2C072CF95BF2}" type="datetimeFigureOut">
               <a:rPr lang="zh-TW" altLang="en-US" smtClean="0"/>
               <a:pPr/>
-              <a:t>2022/4/30</a:t>
+              <a:t>2024/11/2</a:t>
             </a:fld>
             <a:endParaRPr lang="zh-TW" altLang="en-US"/>
           </a:p>
@@ -403,10 +401,9 @@
           <a:lstStyle/>
           <a:p>
             <a:r>
-              <a:rPr lang="zh-TW" altLang="en-US" smtClean="0"/>
+              <a:rPr lang="zh-TW" altLang="en-US"/>
               <a:t>按一下以編輯母片標題樣式</a:t>
             </a:r>
-            <a:endParaRPr lang="zh-TW" altLang="en-US"/>
           </a:p>
         </p:txBody>
       </p:sp>
@@ -427,38 +424,37 @@
           <a:p>
             <a:pPr lvl="0"/>
             <a:r>
-              <a:rPr lang="zh-TW" altLang="en-US" smtClean="0"/>
+              <a:rPr lang="zh-TW" altLang="en-US"/>
               <a:t>按一下以編輯母片文字樣式</a:t>
             </a:r>
           </a:p>
           <a:p>
             <a:pPr lvl="1"/>
             <a:r>
-              <a:rPr lang="zh-TW" altLang="en-US" smtClean="0"/>
+              <a:rPr lang="zh-TW" altLang="en-US"/>
               <a:t>第二層</a:t>
             </a:r>
           </a:p>
           <a:p>
             <a:pPr lvl="2"/>
             <a:r>
-              <a:rPr lang="zh-TW" altLang="en-US" smtClean="0"/>
+              <a:rPr lang="zh-TW" altLang="en-US"/>
               <a:t>第三層</a:t>
             </a:r>
           </a:p>
           <a:p>
             <a:pPr lvl="3"/>
             <a:r>
-              <a:rPr lang="zh-TW" altLang="en-US" smtClean="0"/>
+              <a:rPr lang="zh-TW" altLang="en-US"/>
               <a:t>第四層</a:t>
             </a:r>
           </a:p>
           <a:p>
             <a:pPr lvl="4"/>
             <a:r>
-              <a:rPr lang="zh-TW" altLang="en-US" smtClean="0"/>
+              <a:rPr lang="zh-TW" altLang="en-US"/>
               <a:t>第五層</a:t>
             </a:r>
-            <a:endParaRPr lang="zh-TW" altLang="en-US"/>
           </a:p>
         </p:txBody>
       </p:sp>
@@ -480,7 +476,7 @@
             <a:fld id="{9CEA959E-6A41-412C-8C82-2C072CF95BF2}" type="datetimeFigureOut">
               <a:rPr lang="zh-TW" altLang="en-US" smtClean="0"/>
               <a:pPr/>
-              <a:t>2022/4/30</a:t>
+              <a:t>2024/11/2</a:t>
             </a:fld>
             <a:endParaRPr lang="zh-TW" altLang="en-US"/>
           </a:p>
@@ -575,10 +571,9 @@
           <a:lstStyle/>
           <a:p>
             <a:r>
-              <a:rPr lang="zh-TW" altLang="en-US" smtClean="0"/>
+              <a:rPr lang="zh-TW" altLang="en-US"/>
               <a:t>按一下以編輯母片標題樣式</a:t>
             </a:r>
-            <a:endParaRPr lang="zh-TW" altLang="en-US"/>
           </a:p>
         </p:txBody>
       </p:sp>
@@ -604,38 +599,37 @@
           <a:p>
             <a:pPr lvl="0"/>
             <a:r>
-              <a:rPr lang="zh-TW" altLang="en-US" smtClean="0"/>
+              <a:rPr lang="zh-TW" altLang="en-US"/>
               <a:t>按一下以編輯母片文字樣式</a:t>
             </a:r>
           </a:p>
           <a:p>
             <a:pPr lvl="1"/>
             <a:r>
-              <a:rPr lang="zh-TW" altLang="en-US" smtClean="0"/>
+              <a:rPr lang="zh-TW" altLang="en-US"/>
               <a:t>第二層</a:t>
             </a:r>
           </a:p>
           <a:p>
             <a:pPr lvl="2"/>
             <a:r>
-              <a:rPr lang="zh-TW" altLang="en-US" smtClean="0"/>
+              <a:rPr lang="zh-TW" altLang="en-US"/>
               <a:t>第三層</a:t>
             </a:r>
           </a:p>
           <a:p>
             <a:pPr lvl="3"/>
             <a:r>
-              <a:rPr lang="zh-TW" altLang="en-US" smtClean="0"/>
+              <a:rPr lang="zh-TW" altLang="en-US"/>
               <a:t>第四層</a:t>
             </a:r>
           </a:p>
           <a:p>
             <a:pPr lvl="4"/>
             <a:r>
-              <a:rPr lang="zh-TW" altLang="en-US" smtClean="0"/>
+              <a:rPr lang="zh-TW" altLang="en-US"/>
               <a:t>第五層</a:t>
             </a:r>
-            <a:endParaRPr lang="zh-TW" altLang="en-US"/>
           </a:p>
         </p:txBody>
       </p:sp>
@@ -657,7 +651,7 @@
             <a:fld id="{9CEA959E-6A41-412C-8C82-2C072CF95BF2}" type="datetimeFigureOut">
               <a:rPr lang="zh-TW" altLang="en-US" smtClean="0"/>
               <a:pPr/>
-              <a:t>2022/4/30</a:t>
+              <a:t>2024/11/2</a:t>
             </a:fld>
             <a:endParaRPr lang="zh-TW" altLang="en-US"/>
           </a:p>
@@ -747,10 +741,9 @@
           <a:lstStyle/>
           <a:p>
             <a:r>
-              <a:rPr lang="zh-TW" altLang="en-US" smtClean="0"/>
+              <a:rPr lang="zh-TW" altLang="en-US"/>
               <a:t>按一下以編輯母片標題樣式</a:t>
             </a:r>
-            <a:endParaRPr lang="zh-TW" altLang="en-US"/>
           </a:p>
         </p:txBody>
       </p:sp>
@@ -771,38 +764,37 @@
           <a:p>
             <a:pPr lvl="0"/>
             <a:r>
-              <a:rPr lang="zh-TW" altLang="en-US" smtClean="0"/>
+              <a:rPr lang="zh-TW" altLang="en-US"/>
               <a:t>按一下以編輯母片文字樣式</a:t>
             </a:r>
           </a:p>
           <a:p>
             <a:pPr lvl="1"/>
             <a:r>
-              <a:rPr lang="zh-TW" altLang="en-US" smtClean="0"/>
+              <a:rPr lang="zh-TW" altLang="en-US"/>
               <a:t>第二層</a:t>
             </a:r>
           </a:p>
           <a:p>
             <a:pPr lvl="2"/>
             <a:r>
-              <a:rPr lang="zh-TW" altLang="en-US" smtClean="0"/>
+              <a:rPr lang="zh-TW" altLang="en-US"/>
               <a:t>第三層</a:t>
             </a:r>
           </a:p>
           <a:p>
             <a:pPr lvl="3"/>
             <a:r>
-              <a:rPr lang="zh-TW" altLang="en-US" smtClean="0"/>
+              <a:rPr lang="zh-TW" altLang="en-US"/>
               <a:t>第四層</a:t>
             </a:r>
           </a:p>
           <a:p>
             <a:pPr lvl="4"/>
             <a:r>
-              <a:rPr lang="zh-TW" altLang="en-US" smtClean="0"/>
+              <a:rPr lang="zh-TW" altLang="en-US"/>
               <a:t>第五層</a:t>
             </a:r>
-            <a:endParaRPr lang="zh-TW" altLang="en-US"/>
           </a:p>
         </p:txBody>
       </p:sp>
@@ -824,7 +816,7 @@
             <a:fld id="{9CEA959E-6A41-412C-8C82-2C072CF95BF2}" type="datetimeFigureOut">
               <a:rPr lang="zh-TW" altLang="en-US" smtClean="0"/>
               <a:pPr/>
-              <a:t>2022/4/30</a:t>
+              <a:t>2024/11/2</a:t>
             </a:fld>
             <a:endParaRPr lang="zh-TW" altLang="en-US"/>
           </a:p>
@@ -923,10 +915,9 @@
           </a:lstStyle>
           <a:p>
             <a:r>
-              <a:rPr lang="zh-TW" altLang="en-US" smtClean="0"/>
+              <a:rPr lang="zh-TW" altLang="en-US"/>
               <a:t>按一下以編輯母片標題樣式</a:t>
             </a:r>
-            <a:endParaRPr lang="zh-TW" altLang="en-US"/>
           </a:p>
         </p:txBody>
       </p:sp>
@@ -1043,7 +1034,7 @@
           <a:p>
             <a:pPr lvl="0"/>
             <a:r>
-              <a:rPr lang="zh-TW" altLang="en-US" smtClean="0"/>
+              <a:rPr lang="zh-TW" altLang="en-US"/>
               <a:t>按一下以編輯母片文字樣式</a:t>
             </a:r>
           </a:p>
@@ -1067,7 +1058,7 @@
             <a:fld id="{9CEA959E-6A41-412C-8C82-2C072CF95BF2}" type="datetimeFigureOut">
               <a:rPr lang="zh-TW" altLang="en-US" smtClean="0"/>
               <a:pPr/>
-              <a:t>2022/4/30</a:t>
+              <a:t>2024/11/2</a:t>
             </a:fld>
             <a:endParaRPr lang="zh-TW" altLang="en-US"/>
           </a:p>
@@ -1157,10 +1148,9 @@
           <a:lstStyle/>
           <a:p>
             <a:r>
-              <a:rPr lang="zh-TW" altLang="en-US" smtClean="0"/>
+              <a:rPr lang="zh-TW" altLang="en-US"/>
               <a:t>按一下以編輯母片標題樣式</a:t>
             </a:r>
-            <a:endParaRPr lang="zh-TW" altLang="en-US"/>
           </a:p>
         </p:txBody>
       </p:sp>
@@ -1214,38 +1204,37 @@
           <a:p>
             <a:pPr lvl="0"/>
             <a:r>
-              <a:rPr lang="zh-TW" altLang="en-US" smtClean="0"/>
+              <a:rPr lang="zh-TW" altLang="en-US"/>
               <a:t>按一下以編輯母片文字樣式</a:t>
             </a:r>
           </a:p>
           <a:p>
             <a:pPr lvl="1"/>
             <a:r>
-              <a:rPr lang="zh-TW" altLang="en-US" smtClean="0"/>
+              <a:rPr lang="zh-TW" altLang="en-US"/>
               <a:t>第二層</a:t>
             </a:r>
           </a:p>
           <a:p>
             <a:pPr lvl="2"/>
             <a:r>
-              <a:rPr lang="zh-TW" altLang="en-US" smtClean="0"/>
+              <a:rPr lang="zh-TW" altLang="en-US"/>
               <a:t>第三層</a:t>
             </a:r>
           </a:p>
           <a:p>
             <a:pPr lvl="3"/>
             <a:r>
-              <a:rPr lang="zh-TW" altLang="en-US" smtClean="0"/>
+              <a:rPr lang="zh-TW" altLang="en-US"/>
               <a:t>第四層</a:t>
             </a:r>
           </a:p>
           <a:p>
             <a:pPr lvl="4"/>
             <a:r>
-              <a:rPr lang="zh-TW" altLang="en-US" smtClean="0"/>
+              <a:rPr lang="zh-TW" altLang="en-US"/>
               <a:t>第五層</a:t>
             </a:r>
-            <a:endParaRPr lang="zh-TW" altLang="en-US"/>
           </a:p>
         </p:txBody>
       </p:sp>
@@ -1299,38 +1288,37 @@
           <a:p>
             <a:pPr lvl="0"/>
             <a:r>
-              <a:rPr lang="zh-TW" altLang="en-US" smtClean="0"/>
+              <a:rPr lang="zh-TW" altLang="en-US"/>
               <a:t>按一下以編輯母片文字樣式</a:t>
             </a:r>
           </a:p>
           <a:p>
             <a:pPr lvl="1"/>
             <a:r>
-              <a:rPr lang="zh-TW" altLang="en-US" smtClean="0"/>
+              <a:rPr lang="zh-TW" altLang="en-US"/>
               <a:t>第二層</a:t>
             </a:r>
           </a:p>
           <a:p>
             <a:pPr lvl="2"/>
             <a:r>
-              <a:rPr lang="zh-TW" altLang="en-US" smtClean="0"/>
+              <a:rPr lang="zh-TW" altLang="en-US"/>
               <a:t>第三層</a:t>
             </a:r>
           </a:p>
           <a:p>
             <a:pPr lvl="3"/>
             <a:r>
-              <a:rPr lang="zh-TW" altLang="en-US" smtClean="0"/>
+              <a:rPr lang="zh-TW" altLang="en-US"/>
               <a:t>第四層</a:t>
             </a:r>
           </a:p>
           <a:p>
             <a:pPr lvl="4"/>
             <a:r>
-              <a:rPr lang="zh-TW" altLang="en-US" smtClean="0"/>
+              <a:rPr lang="zh-TW" altLang="en-US"/>
               <a:t>第五層</a:t>
             </a:r>
-            <a:endParaRPr lang="zh-TW" altLang="en-US"/>
           </a:p>
         </p:txBody>
       </p:sp>
@@ -1352,7 +1340,7 @@
             <a:fld id="{9CEA959E-6A41-412C-8C82-2C072CF95BF2}" type="datetimeFigureOut">
               <a:rPr lang="zh-TW" altLang="en-US" smtClean="0"/>
               <a:pPr/>
-              <a:t>2022/4/30</a:t>
+              <a:t>2024/11/2</a:t>
             </a:fld>
             <a:endParaRPr lang="zh-TW" altLang="en-US"/>
           </a:p>
@@ -1446,10 +1434,9 @@
           </a:lstStyle>
           <a:p>
             <a:r>
-              <a:rPr lang="zh-TW" altLang="en-US" smtClean="0"/>
+              <a:rPr lang="zh-TW" altLang="en-US"/>
               <a:t>按一下以編輯母片標題樣式</a:t>
             </a:r>
-            <a:endParaRPr lang="zh-TW" altLang="en-US"/>
           </a:p>
         </p:txBody>
       </p:sp>
@@ -1512,7 +1499,7 @@
           <a:p>
             <a:pPr lvl="0"/>
             <a:r>
-              <a:rPr lang="zh-TW" altLang="en-US" smtClean="0"/>
+              <a:rPr lang="zh-TW" altLang="en-US"/>
               <a:t>按一下以編輯母片文字樣式</a:t>
             </a:r>
           </a:p>
@@ -1568,38 +1555,37 @@
           <a:p>
             <a:pPr lvl="0"/>
             <a:r>
-              <a:rPr lang="zh-TW" altLang="en-US" smtClean="0"/>
+              <a:rPr lang="zh-TW" altLang="en-US"/>
               <a:t>按一下以編輯母片文字樣式</a:t>
             </a:r>
           </a:p>
           <a:p>
             <a:pPr lvl="1"/>
             <a:r>
-              <a:rPr lang="zh-TW" altLang="en-US" smtClean="0"/>
+              <a:rPr lang="zh-TW" altLang="en-US"/>
               <a:t>第二層</a:t>
             </a:r>
           </a:p>
           <a:p>
             <a:pPr lvl="2"/>
             <a:r>
-              <a:rPr lang="zh-TW" altLang="en-US" smtClean="0"/>
+              <a:rPr lang="zh-TW" altLang="en-US"/>
               <a:t>第三層</a:t>
             </a:r>
           </a:p>
           <a:p>
             <a:pPr lvl="3"/>
             <a:r>
-              <a:rPr lang="zh-TW" altLang="en-US" smtClean="0"/>
+              <a:rPr lang="zh-TW" altLang="en-US"/>
               <a:t>第四層</a:t>
             </a:r>
           </a:p>
           <a:p>
             <a:pPr lvl="4"/>
             <a:r>
-              <a:rPr lang="zh-TW" altLang="en-US" smtClean="0"/>
+              <a:rPr lang="zh-TW" altLang="en-US"/>
               <a:t>第五層</a:t>
             </a:r>
-            <a:endParaRPr lang="zh-TW" altLang="en-US"/>
           </a:p>
         </p:txBody>
       </p:sp>
@@ -1662,7 +1648,7 @@
           <a:p>
             <a:pPr lvl="0"/>
             <a:r>
-              <a:rPr lang="zh-TW" altLang="en-US" smtClean="0"/>
+              <a:rPr lang="zh-TW" altLang="en-US"/>
               <a:t>按一下以編輯母片文字樣式</a:t>
             </a:r>
           </a:p>
@@ -1718,38 +1704,37 @@
           <a:p>
             <a:pPr lvl="0"/>
             <a:r>
-              <a:rPr lang="zh-TW" altLang="en-US" smtClean="0"/>
+              <a:rPr lang="zh-TW" altLang="en-US"/>
               <a:t>按一下以編輯母片文字樣式</a:t>
             </a:r>
           </a:p>
           <a:p>
             <a:pPr lvl="1"/>
             <a:r>
-              <a:rPr lang="zh-TW" altLang="en-US" smtClean="0"/>
+              <a:rPr lang="zh-TW" altLang="en-US"/>
               <a:t>第二層</a:t>
             </a:r>
           </a:p>
           <a:p>
             <a:pPr lvl="2"/>
             <a:r>
-              <a:rPr lang="zh-TW" altLang="en-US" smtClean="0"/>
+              <a:rPr lang="zh-TW" altLang="en-US"/>
               <a:t>第三層</a:t>
             </a:r>
           </a:p>
           <a:p>
             <a:pPr lvl="3"/>
             <a:r>
-              <a:rPr lang="zh-TW" altLang="en-US" smtClean="0"/>
+              <a:rPr lang="zh-TW" altLang="en-US"/>
               <a:t>第四層</a:t>
             </a:r>
           </a:p>
           <a:p>
             <a:pPr lvl="4"/>
             <a:r>
-              <a:rPr lang="zh-TW" altLang="en-US" smtClean="0"/>
+              <a:rPr lang="zh-TW" altLang="en-US"/>
               <a:t>第五層</a:t>
             </a:r>
-            <a:endParaRPr lang="zh-TW" altLang="en-US"/>
           </a:p>
         </p:txBody>
       </p:sp>
@@ -1771,7 +1756,7 @@
             <a:fld id="{9CEA959E-6A41-412C-8C82-2C072CF95BF2}" type="datetimeFigureOut">
               <a:rPr lang="zh-TW" altLang="en-US" smtClean="0"/>
               <a:pPr/>
-              <a:t>2022/4/30</a:t>
+              <a:t>2024/11/2</a:t>
             </a:fld>
             <a:endParaRPr lang="zh-TW" altLang="en-US"/>
           </a:p>
@@ -1861,10 +1846,9 @@
           <a:lstStyle/>
           <a:p>
             <a:r>
-              <a:rPr lang="zh-TW" altLang="en-US" smtClean="0"/>
+              <a:rPr lang="zh-TW" altLang="en-US"/>
               <a:t>按一下以編輯母片標題樣式</a:t>
             </a:r>
-            <a:endParaRPr lang="zh-TW" altLang="en-US"/>
           </a:p>
         </p:txBody>
       </p:sp>
@@ -1886,7 +1870,7 @@
             <a:fld id="{9CEA959E-6A41-412C-8C82-2C072CF95BF2}" type="datetimeFigureOut">
               <a:rPr lang="zh-TW" altLang="en-US" smtClean="0"/>
               <a:pPr/>
-              <a:t>2022/4/30</a:t>
+              <a:t>2024/11/2</a:t>
             </a:fld>
             <a:endParaRPr lang="zh-TW" altLang="en-US"/>
           </a:p>
@@ -1978,7 +1962,7 @@
             <a:fld id="{9CEA959E-6A41-412C-8C82-2C072CF95BF2}" type="datetimeFigureOut">
               <a:rPr lang="zh-TW" altLang="en-US" smtClean="0"/>
               <a:pPr/>
-              <a:t>2022/4/30</a:t>
+              <a:t>2024/11/2</a:t>
             </a:fld>
             <a:endParaRPr lang="zh-TW" altLang="en-US"/>
           </a:p>
@@ -2077,10 +2061,9 @@
           </a:lstStyle>
           <a:p>
             <a:r>
-              <a:rPr lang="zh-TW" altLang="en-US" smtClean="0"/>
+              <a:rPr lang="zh-TW" altLang="en-US"/>
               <a:t>按一下以編輯母片標題樣式</a:t>
             </a:r>
-            <a:endParaRPr lang="zh-TW" altLang="en-US"/>
           </a:p>
         </p:txBody>
       </p:sp>
@@ -2134,38 +2117,37 @@
           <a:p>
             <a:pPr lvl="0"/>
             <a:r>
-              <a:rPr lang="zh-TW" altLang="en-US" smtClean="0"/>
+              <a:rPr lang="zh-TW" altLang="en-US"/>
               <a:t>按一下以編輯母片文字樣式</a:t>
             </a:r>
           </a:p>
           <a:p>
             <a:pPr lvl="1"/>
             <a:r>
-              <a:rPr lang="zh-TW" altLang="en-US" smtClean="0"/>
+              <a:rPr lang="zh-TW" altLang="en-US"/>
               <a:t>第二層</a:t>
             </a:r>
           </a:p>
           <a:p>
             <a:pPr lvl="2"/>
             <a:r>
-              <a:rPr lang="zh-TW" altLang="en-US" smtClean="0"/>
+              <a:rPr lang="zh-TW" altLang="en-US"/>
               <a:t>第三層</a:t>
             </a:r>
           </a:p>
           <a:p>
             <a:pPr lvl="3"/>
             <a:r>
-              <a:rPr lang="zh-TW" altLang="en-US" smtClean="0"/>
+              <a:rPr lang="zh-TW" altLang="en-US"/>
               <a:t>第四層</a:t>
             </a:r>
           </a:p>
           <a:p>
             <a:pPr lvl="4"/>
             <a:r>
-              <a:rPr lang="zh-TW" altLang="en-US" smtClean="0"/>
+              <a:rPr lang="zh-TW" altLang="en-US"/>
               <a:t>第五層</a:t>
             </a:r>
-            <a:endParaRPr lang="zh-TW" altLang="en-US"/>
           </a:p>
         </p:txBody>
       </p:sp>
@@ -2228,7 +2210,7 @@
           <a:p>
             <a:pPr lvl="0"/>
             <a:r>
-              <a:rPr lang="zh-TW" altLang="en-US" smtClean="0"/>
+              <a:rPr lang="zh-TW" altLang="en-US"/>
               <a:t>按一下以編輯母片文字樣式</a:t>
             </a:r>
           </a:p>
@@ -2252,7 +2234,7 @@
             <a:fld id="{9CEA959E-6A41-412C-8C82-2C072CF95BF2}" type="datetimeFigureOut">
               <a:rPr lang="zh-TW" altLang="en-US" smtClean="0"/>
               <a:pPr/>
-              <a:t>2022/4/30</a:t>
+              <a:t>2024/11/2</a:t>
             </a:fld>
             <a:endParaRPr lang="zh-TW" altLang="en-US"/>
           </a:p>
@@ -2351,10 +2333,9 @@
           </a:lstStyle>
           <a:p>
             <a:r>
-              <a:rPr lang="zh-TW" altLang="en-US" smtClean="0"/>
+              <a:rPr lang="zh-TW" altLang="en-US"/>
               <a:t>按一下以編輯母片標題樣式</a:t>
             </a:r>
-            <a:endParaRPr lang="zh-TW" altLang="en-US"/>
           </a:p>
         </p:txBody>
       </p:sp>
@@ -2416,10 +2397,9 @@
           </a:lstStyle>
           <a:p>
             <a:r>
-              <a:rPr lang="zh-TW" altLang="en-US" smtClean="0"/>
+              <a:rPr lang="zh-TW" altLang="en-US"/>
               <a:t>按一下圖示以新增圖片</a:t>
             </a:r>
-            <a:endParaRPr lang="zh-TW" altLang="en-US"/>
           </a:p>
         </p:txBody>
       </p:sp>
@@ -2482,7 +2462,7 @@
           <a:p>
             <a:pPr lvl="0"/>
             <a:r>
-              <a:rPr lang="zh-TW" altLang="en-US" smtClean="0"/>
+              <a:rPr lang="zh-TW" altLang="en-US"/>
               <a:t>按一下以編輯母片文字樣式</a:t>
             </a:r>
           </a:p>
@@ -2506,7 +2486,7 @@
             <a:fld id="{9CEA959E-6A41-412C-8C82-2C072CF95BF2}" type="datetimeFigureOut">
               <a:rPr lang="zh-TW" altLang="en-US" smtClean="0"/>
               <a:pPr/>
-              <a:t>2022/4/30</a:t>
+              <a:t>2024/11/2</a:t>
             </a:fld>
             <a:endParaRPr lang="zh-TW" altLang="en-US"/>
           </a:p>
@@ -2616,10 +2596,9 @@
           <a:lstStyle/>
           <a:p>
             <a:r>
-              <a:rPr lang="zh-TW" altLang="en-US" smtClean="0"/>
+              <a:rPr lang="zh-TW" altLang="en-US"/>
               <a:t>按一下以編輯母片標題樣式</a:t>
             </a:r>
-            <a:endParaRPr lang="zh-TW" altLang="en-US"/>
           </a:p>
         </p:txBody>
       </p:sp>
@@ -2650,38 +2629,37 @@
           <a:p>
             <a:pPr lvl="0"/>
             <a:r>
-              <a:rPr lang="zh-TW" altLang="en-US" smtClean="0"/>
+              <a:rPr lang="zh-TW" altLang="en-US"/>
               <a:t>按一下以編輯母片文字樣式</a:t>
             </a:r>
           </a:p>
           <a:p>
             <a:pPr lvl="1"/>
             <a:r>
-              <a:rPr lang="zh-TW" altLang="en-US" smtClean="0"/>
+              <a:rPr lang="zh-TW" altLang="en-US"/>
               <a:t>第二層</a:t>
             </a:r>
           </a:p>
           <a:p>
             <a:pPr lvl="2"/>
             <a:r>
-              <a:rPr lang="zh-TW" altLang="en-US" smtClean="0"/>
+              <a:rPr lang="zh-TW" altLang="en-US"/>
               <a:t>第三層</a:t>
             </a:r>
           </a:p>
           <a:p>
             <a:pPr lvl="3"/>
             <a:r>
-              <a:rPr lang="zh-TW" altLang="en-US" smtClean="0"/>
+              <a:rPr lang="zh-TW" altLang="en-US"/>
               <a:t>第四層</a:t>
             </a:r>
           </a:p>
           <a:p>
             <a:pPr lvl="4"/>
             <a:r>
-              <a:rPr lang="zh-TW" altLang="en-US" smtClean="0"/>
+              <a:rPr lang="zh-TW" altLang="en-US"/>
               <a:t>第五層</a:t>
             </a:r>
-            <a:endParaRPr lang="zh-TW" altLang="en-US"/>
           </a:p>
         </p:txBody>
       </p:sp>
@@ -2721,7 +2699,7 @@
             <a:fld id="{9CEA959E-6A41-412C-8C82-2C072CF95BF2}" type="datetimeFigureOut">
               <a:rPr lang="zh-TW" altLang="en-US" smtClean="0"/>
               <a:pPr/>
-              <a:t>2022/4/30</a:t>
+              <a:t>2024/11/2</a:t>
             </a:fld>
             <a:endParaRPr lang="zh-TW" altLang="en-US"/>
           </a:p>
@@ -3104,7 +3082,7 @@
         </p:nvSpPr>
         <p:spPr>
           <a:xfrm>
-            <a:off x="0" y="2143135"/>
+            <a:off x="0" y="1995686"/>
             <a:ext cx="9144000" cy="857250"/>
           </a:xfrm>
         </p:spPr>
@@ -3115,7 +3093,7 @@
           <a:lstStyle/>
           <a:p>
             <a:r>
-              <a:rPr lang="zh-TW" altLang="en-US" sz="5400" b="1" i="1" dirty="0" smtClean="0">
+              <a:rPr lang="zh-TW" altLang="en-US" sz="5400" b="1" i="1" dirty="0">
                 <a:solidFill>
                   <a:srgbClr val="000066"/>
                 </a:solidFill>
@@ -3129,44 +3107,10 @@
                 <a:latin typeface="微軟正黑體" pitchFamily="34" charset="-120"/>
                 <a:ea typeface="微軟正黑體" pitchFamily="34" charset="-120"/>
               </a:rPr>
-              <a:t>我</a:t>
-            </a:r>
-            <a:r>
-              <a:rPr lang="zh-TW" altLang="en-US" sz="5400" b="1" i="1" dirty="0">
-                <a:solidFill>
-                  <a:srgbClr val="000066"/>
-                </a:solidFill>
-                <a:effectLst>
-                  <a:outerShdw blurRad="38100" dist="38100" dir="2700000" algn="tl">
-                    <a:srgbClr val="000000">
-                      <a:alpha val="43137"/>
-                    </a:srgbClr>
-                  </a:outerShdw>
-                </a:effectLst>
-                <a:latin typeface="微軟正黑體" pitchFamily="34" charset="-120"/>
-                <a:ea typeface="微軟正黑體" pitchFamily="34" charset="-120"/>
-              </a:rPr>
-              <a:t>的</a:t>
-            </a:r>
-            <a:r>
-              <a:rPr lang="zh-TW" altLang="en-US" sz="5400" b="1" i="1" dirty="0" smtClean="0">
-                <a:solidFill>
-                  <a:srgbClr val="000066"/>
-                </a:solidFill>
-                <a:effectLst>
-                  <a:outerShdw blurRad="38100" dist="38100" dir="2700000" algn="tl">
-                    <a:srgbClr val="000000">
-                      <a:alpha val="43137"/>
-                    </a:srgbClr>
-                  </a:outerShdw>
-                </a:effectLst>
-                <a:latin typeface="微軟正黑體" pitchFamily="34" charset="-120"/>
-                <a:ea typeface="微軟正黑體" pitchFamily="34" charset="-120"/>
-              </a:rPr>
-              <a:t>心</a:t>
-            </a:r>
-            <a:r>
-              <a:rPr lang="zh-CN" altLang="en-US" sz="5400" b="1" i="1" dirty="0" smtClean="0">
+              <a:t>我的心</a:t>
+            </a:r>
+            <a:r>
+              <a:rPr lang="zh-CN" altLang="en-US" sz="5400" b="1" i="1" dirty="0">
                 <a:solidFill>
                   <a:srgbClr val="000066"/>
                 </a:solidFill>
@@ -3183,7 +3127,7 @@
               <a:t>，</a:t>
             </a:r>
             <a:r>
-              <a:rPr lang="zh-TW" altLang="en-US" sz="5400" b="1" i="1" dirty="0" smtClean="0">
+              <a:rPr lang="zh-TW" altLang="en-US" sz="5400" b="1" i="1" dirty="0">
                 <a:solidFill>
                   <a:srgbClr val="000066"/>
                 </a:solidFill>
@@ -3197,24 +3141,7 @@
                 <a:latin typeface="微軟正黑體" pitchFamily="34" charset="-120"/>
                 <a:ea typeface="微軟正黑體" pitchFamily="34" charset="-120"/>
               </a:rPr>
-              <a:t>你</a:t>
-            </a:r>
-            <a:r>
-              <a:rPr lang="zh-TW" altLang="en-US" sz="5400" b="1" i="1" dirty="0">
-                <a:solidFill>
-                  <a:srgbClr val="000066"/>
-                </a:solidFill>
-                <a:effectLst>
-                  <a:outerShdw blurRad="38100" dist="38100" dir="2700000" algn="tl">
-                    <a:srgbClr val="000000">
-                      <a:alpha val="43137"/>
-                    </a:srgbClr>
-                  </a:outerShdw>
-                </a:effectLst>
-                <a:latin typeface="微軟正黑體" pitchFamily="34" charset="-120"/>
-                <a:ea typeface="微軟正黑體" pitchFamily="34" charset="-120"/>
-              </a:rPr>
-              <a:t>要稱頌耶和華</a:t>
+              <a:t>你要稱頌耶和華</a:t>
             </a:r>
           </a:p>
         </p:txBody>
@@ -3351,7 +3278,7 @@
               <a:t>( </a:t>
             </a:r>
             <a:r>
-              <a:rPr lang="zh-CN" altLang="en-US" sz="3200" b="1" dirty="0" smtClean="0">
+              <a:rPr lang="zh-CN" altLang="en-US" sz="3200" b="1" dirty="0">
                 <a:solidFill>
                   <a:srgbClr val="000066"/>
                 </a:solidFill>
@@ -3359,10 +3286,10 @@
                 <a:latin typeface="Microsoft JhengHei" panose="020B0604030504040204" pitchFamily="34" charset="-120"/>
                 <a:ea typeface="Microsoft JhengHei" panose="020B0604030504040204" pitchFamily="34" charset="-120"/>
               </a:rPr>
-              <a:t>正</a:t>
-            </a:r>
-            <a:r>
-              <a:rPr lang="en-US" sz="3200" b="1" dirty="0" smtClean="0">
+              <a:t>正歌</a:t>
+            </a:r>
+            <a:r>
+              <a:rPr lang="en-US" sz="3200" b="1" dirty="0">
                 <a:solidFill>
                   <a:srgbClr val="000066"/>
                 </a:solidFill>
@@ -3370,18 +3297,7 @@
                 <a:latin typeface="Microsoft JhengHei" panose="020B0604030504040204" pitchFamily="34" charset="-120"/>
                 <a:ea typeface="Microsoft JhengHei" panose="020B0604030504040204" pitchFamily="34" charset="-120"/>
               </a:rPr>
-              <a:t> </a:t>
-            </a:r>
-            <a:r>
-              <a:rPr lang="en-US" sz="3200" b="1" dirty="0">
-                <a:solidFill>
-                  <a:srgbClr val="000066"/>
-                </a:solidFill>
-                <a:effectLst/>
-                <a:latin typeface="Microsoft JhengHei" panose="020B0604030504040204" pitchFamily="34" charset="-120"/>
-                <a:ea typeface="Microsoft JhengHei" panose="020B0604030504040204" pitchFamily="34" charset="-120"/>
-              </a:rPr>
-              <a:t>)</a:t>
+              <a:t> )</a:t>
             </a:r>
             <a:endParaRPr lang="vi-VN" sz="3200" b="1" dirty="0">
               <a:solidFill>
@@ -3519,7 +3435,7 @@
               <a:t>( </a:t>
             </a:r>
             <a:r>
-              <a:rPr lang="zh-CN" altLang="en-US" sz="3200" b="1" dirty="0" smtClean="0">
+              <a:rPr lang="zh-CN" altLang="en-US" sz="3200" b="1" dirty="0">
                 <a:solidFill>
                   <a:srgbClr val="000066"/>
                 </a:solidFill>
@@ -3527,10 +3443,10 @@
                 <a:latin typeface="Microsoft JhengHei" panose="020B0604030504040204" pitchFamily="34" charset="-120"/>
                 <a:ea typeface="Microsoft JhengHei" panose="020B0604030504040204" pitchFamily="34" charset="-120"/>
               </a:rPr>
-              <a:t>正</a:t>
-            </a:r>
-            <a:r>
-              <a:rPr lang="en-US" sz="3200" b="1" dirty="0" smtClean="0">
+              <a:t>正歌</a:t>
+            </a:r>
+            <a:r>
+              <a:rPr lang="en-US" sz="3200" b="1" dirty="0">
                 <a:solidFill>
                   <a:srgbClr val="000066"/>
                 </a:solidFill>
@@ -3538,18 +3454,7 @@
                 <a:latin typeface="Microsoft JhengHei" panose="020B0604030504040204" pitchFamily="34" charset="-120"/>
                 <a:ea typeface="Microsoft JhengHei" panose="020B0604030504040204" pitchFamily="34" charset="-120"/>
               </a:rPr>
-              <a:t> </a:t>
-            </a:r>
-            <a:r>
-              <a:rPr lang="en-US" sz="3200" b="1" dirty="0">
-                <a:solidFill>
-                  <a:srgbClr val="000066"/>
-                </a:solidFill>
-                <a:effectLst/>
-                <a:latin typeface="Microsoft JhengHei" panose="020B0604030504040204" pitchFamily="34" charset="-120"/>
-                <a:ea typeface="Microsoft JhengHei" panose="020B0604030504040204" pitchFamily="34" charset="-120"/>
-              </a:rPr>
-              <a:t>)</a:t>
+              <a:t> )</a:t>
             </a:r>
             <a:endParaRPr lang="vi-VN" sz="3200" b="1" dirty="0">
               <a:solidFill>
@@ -3694,7 +3599,7 @@
               <a:t>( </a:t>
             </a:r>
             <a:r>
-              <a:rPr lang="zh-CN" altLang="en-US" sz="3200" b="1" dirty="0" smtClean="0">
+              <a:rPr lang="zh-CN" altLang="en-US" sz="3200" b="1" dirty="0">
                 <a:solidFill>
                   <a:srgbClr val="000066"/>
                 </a:solidFill>
@@ -3702,10 +3607,10 @@
                 <a:latin typeface="Microsoft JhengHei" panose="020B0604030504040204" pitchFamily="34" charset="-120"/>
                 <a:ea typeface="Microsoft JhengHei" panose="020B0604030504040204" pitchFamily="34" charset="-120"/>
               </a:rPr>
-              <a:t>正</a:t>
-            </a:r>
-            <a:r>
-              <a:rPr lang="en-US" sz="3200" b="1" dirty="0" smtClean="0">
+              <a:t>正歌</a:t>
+            </a:r>
+            <a:r>
+              <a:rPr lang="en-US" sz="3200" b="1" dirty="0">
                 <a:solidFill>
                   <a:srgbClr val="000066"/>
                 </a:solidFill>
@@ -3713,18 +3618,7 @@
                 <a:latin typeface="Microsoft JhengHei" panose="020B0604030504040204" pitchFamily="34" charset="-120"/>
                 <a:ea typeface="Microsoft JhengHei" panose="020B0604030504040204" pitchFamily="34" charset="-120"/>
               </a:rPr>
-              <a:t> </a:t>
-            </a:r>
-            <a:r>
-              <a:rPr lang="en-US" sz="3200" b="1" dirty="0">
-                <a:solidFill>
-                  <a:srgbClr val="000066"/>
-                </a:solidFill>
-                <a:effectLst/>
-                <a:latin typeface="Microsoft JhengHei" panose="020B0604030504040204" pitchFamily="34" charset="-120"/>
-                <a:ea typeface="Microsoft JhengHei" panose="020B0604030504040204" pitchFamily="34" charset="-120"/>
-              </a:rPr>
-              <a:t>)</a:t>
+              <a:t> )</a:t>
             </a:r>
             <a:endParaRPr lang="vi-VN" sz="3200" b="1" dirty="0">
               <a:solidFill>
@@ -3862,7 +3756,7 @@
               <a:t>( </a:t>
             </a:r>
             <a:r>
-              <a:rPr lang="zh-CN" altLang="en-US" sz="3200" b="1" dirty="0" smtClean="0">
+              <a:rPr lang="zh-CN" altLang="en-US" sz="3200" b="1" dirty="0">
                 <a:solidFill>
                   <a:srgbClr val="000066"/>
                 </a:solidFill>
@@ -3870,10 +3764,10 @@
                 <a:latin typeface="Microsoft JhengHei" panose="020B0604030504040204" pitchFamily="34" charset="-120"/>
                 <a:ea typeface="Microsoft JhengHei" panose="020B0604030504040204" pitchFamily="34" charset="-120"/>
               </a:rPr>
-              <a:t>正</a:t>
-            </a:r>
-            <a:r>
-              <a:rPr lang="en-US" sz="3200" b="1" dirty="0" smtClean="0">
+              <a:t>正歌</a:t>
+            </a:r>
+            <a:r>
+              <a:rPr lang="en-US" sz="3200" b="1" dirty="0">
                 <a:solidFill>
                   <a:srgbClr val="000066"/>
                 </a:solidFill>
@@ -3881,18 +3775,7 @@
                 <a:latin typeface="Microsoft JhengHei" panose="020B0604030504040204" pitchFamily="34" charset="-120"/>
                 <a:ea typeface="Microsoft JhengHei" panose="020B0604030504040204" pitchFamily="34" charset="-120"/>
               </a:rPr>
-              <a:t> </a:t>
-            </a:r>
-            <a:r>
-              <a:rPr lang="en-US" sz="3200" b="1" dirty="0">
-                <a:solidFill>
-                  <a:srgbClr val="000066"/>
-                </a:solidFill>
-                <a:effectLst/>
-                <a:latin typeface="Microsoft JhengHei" panose="020B0604030504040204" pitchFamily="34" charset="-120"/>
-                <a:ea typeface="Microsoft JhengHei" panose="020B0604030504040204" pitchFamily="34" charset="-120"/>
-              </a:rPr>
-              <a:t>)</a:t>
+              <a:t> )</a:t>
             </a:r>
             <a:endParaRPr lang="vi-VN" sz="3200" b="1" dirty="0">
               <a:solidFill>
@@ -4037,7 +3920,7 @@
               <a:t>( </a:t>
             </a:r>
             <a:r>
-              <a:rPr lang="zh-CN" altLang="en-US" sz="3200" b="1" dirty="0" smtClean="0">
+              <a:rPr lang="zh-CN" altLang="en-US" sz="3200" b="1" dirty="0">
                 <a:solidFill>
                   <a:srgbClr val="000066"/>
                 </a:solidFill>
@@ -4045,10 +3928,10 @@
                 <a:latin typeface="Microsoft JhengHei" panose="020B0604030504040204" pitchFamily="34" charset="-120"/>
                 <a:ea typeface="Microsoft JhengHei" panose="020B0604030504040204" pitchFamily="34" charset="-120"/>
               </a:rPr>
-              <a:t>副</a:t>
-            </a:r>
-            <a:r>
-              <a:rPr lang="en-US" sz="3200" b="1" dirty="0" smtClean="0">
+              <a:t>副歌</a:t>
+            </a:r>
+            <a:r>
+              <a:rPr lang="en-US" sz="3200" b="1" dirty="0">
                 <a:solidFill>
                   <a:srgbClr val="000066"/>
                 </a:solidFill>
@@ -4056,18 +3939,7 @@
                 <a:latin typeface="Microsoft JhengHei" panose="020B0604030504040204" pitchFamily="34" charset="-120"/>
                 <a:ea typeface="Microsoft JhengHei" panose="020B0604030504040204" pitchFamily="34" charset="-120"/>
               </a:rPr>
-              <a:t> </a:t>
-            </a:r>
-            <a:r>
-              <a:rPr lang="en-US" sz="3200" b="1" dirty="0">
-                <a:solidFill>
-                  <a:srgbClr val="000066"/>
-                </a:solidFill>
-                <a:effectLst/>
-                <a:latin typeface="Microsoft JhengHei" panose="020B0604030504040204" pitchFamily="34" charset="-120"/>
-                <a:ea typeface="Microsoft JhengHei" panose="020B0604030504040204" pitchFamily="34" charset="-120"/>
-              </a:rPr>
-              <a:t>)</a:t>
+              <a:t> )</a:t>
             </a:r>
             <a:endParaRPr lang="vi-VN" sz="3200" b="1" dirty="0">
               <a:solidFill>
@@ -4205,7 +4077,7 @@
               <a:t>( </a:t>
             </a:r>
             <a:r>
-              <a:rPr lang="zh-CN" altLang="en-US" sz="3200" b="1" dirty="0" smtClean="0">
+              <a:rPr lang="zh-CN" altLang="en-US" sz="3200" b="1" dirty="0">
                 <a:solidFill>
                   <a:srgbClr val="000066"/>
                 </a:solidFill>
@@ -4213,10 +4085,10 @@
                 <a:latin typeface="Microsoft JhengHei" panose="020B0604030504040204" pitchFamily="34" charset="-120"/>
                 <a:ea typeface="Microsoft JhengHei" panose="020B0604030504040204" pitchFamily="34" charset="-120"/>
               </a:rPr>
-              <a:t>副</a:t>
-            </a:r>
-            <a:r>
-              <a:rPr lang="en-US" sz="3200" b="1" dirty="0" smtClean="0">
+              <a:t>副歌</a:t>
+            </a:r>
+            <a:r>
+              <a:rPr lang="en-US" sz="3200" b="1" dirty="0">
                 <a:solidFill>
                   <a:srgbClr val="000066"/>
                 </a:solidFill>
@@ -4224,18 +4096,7 @@
                 <a:latin typeface="Microsoft JhengHei" panose="020B0604030504040204" pitchFamily="34" charset="-120"/>
                 <a:ea typeface="Microsoft JhengHei" panose="020B0604030504040204" pitchFamily="34" charset="-120"/>
               </a:rPr>
-              <a:t> </a:t>
-            </a:r>
-            <a:r>
-              <a:rPr lang="en-US" sz="3200" b="1" dirty="0">
-                <a:solidFill>
-                  <a:srgbClr val="000066"/>
-                </a:solidFill>
-                <a:effectLst/>
-                <a:latin typeface="Microsoft JhengHei" panose="020B0604030504040204" pitchFamily="34" charset="-120"/>
-                <a:ea typeface="Microsoft JhengHei" panose="020B0604030504040204" pitchFamily="34" charset="-120"/>
-              </a:rPr>
-              <a:t>)</a:t>
+              <a:t> )</a:t>
             </a:r>
             <a:endParaRPr lang="vi-VN" sz="3200" b="1" dirty="0">
               <a:solidFill>
@@ -4380,7 +4241,7 @@
               <a:t>( </a:t>
             </a:r>
             <a:r>
-              <a:rPr lang="zh-CN" altLang="en-US" sz="3200" b="1" dirty="0" smtClean="0">
+              <a:rPr lang="zh-CN" altLang="en-US" sz="3200" b="1" dirty="0">
                 <a:solidFill>
                   <a:srgbClr val="000066"/>
                 </a:solidFill>
@@ -4388,10 +4249,10 @@
                 <a:latin typeface="Microsoft JhengHei" panose="020B0604030504040204" pitchFamily="34" charset="-120"/>
                 <a:ea typeface="Microsoft JhengHei" panose="020B0604030504040204" pitchFamily="34" charset="-120"/>
               </a:rPr>
-              <a:t>副</a:t>
-            </a:r>
-            <a:r>
-              <a:rPr lang="en-US" sz="3200" b="1" dirty="0" smtClean="0">
+              <a:t>副歌</a:t>
+            </a:r>
+            <a:r>
+              <a:rPr lang="en-US" sz="3200" b="1" dirty="0">
                 <a:solidFill>
                   <a:srgbClr val="000066"/>
                 </a:solidFill>
@@ -4399,18 +4260,7 @@
                 <a:latin typeface="Microsoft JhengHei" panose="020B0604030504040204" pitchFamily="34" charset="-120"/>
                 <a:ea typeface="Microsoft JhengHei" panose="020B0604030504040204" pitchFamily="34" charset="-120"/>
               </a:rPr>
-              <a:t> </a:t>
-            </a:r>
-            <a:r>
-              <a:rPr lang="en-US" sz="3200" b="1" dirty="0">
-                <a:solidFill>
-                  <a:srgbClr val="000066"/>
-                </a:solidFill>
-                <a:effectLst/>
-                <a:latin typeface="Microsoft JhengHei" panose="020B0604030504040204" pitchFamily="34" charset="-120"/>
-                <a:ea typeface="Microsoft JhengHei" panose="020B0604030504040204" pitchFamily="34" charset="-120"/>
-              </a:rPr>
-              <a:t>)</a:t>
+              <a:t> )</a:t>
             </a:r>
             <a:endParaRPr lang="vi-VN" sz="3200" b="1" dirty="0">
               <a:solidFill>
@@ -4548,7 +4398,7 @@
               <a:t>( </a:t>
             </a:r>
             <a:r>
-              <a:rPr lang="zh-CN" altLang="en-US" sz="3200" b="1" dirty="0" smtClean="0">
+              <a:rPr lang="zh-CN" altLang="en-US" sz="3200" b="1" dirty="0">
                 <a:solidFill>
                   <a:srgbClr val="000066"/>
                 </a:solidFill>
@@ -4556,10 +4406,10 @@
                 <a:latin typeface="Microsoft JhengHei" panose="020B0604030504040204" pitchFamily="34" charset="-120"/>
                 <a:ea typeface="Microsoft JhengHei" panose="020B0604030504040204" pitchFamily="34" charset="-120"/>
               </a:rPr>
-              <a:t>副</a:t>
-            </a:r>
-            <a:r>
-              <a:rPr lang="en-US" sz="3200" b="1" dirty="0" smtClean="0">
+              <a:t>副歌</a:t>
+            </a:r>
+            <a:r>
+              <a:rPr lang="en-US" sz="3200" b="1">
                 <a:solidFill>
                   <a:srgbClr val="000066"/>
                 </a:solidFill>
@@ -4567,18 +4417,7 @@
                 <a:latin typeface="Microsoft JhengHei" panose="020B0604030504040204" pitchFamily="34" charset="-120"/>
                 <a:ea typeface="Microsoft JhengHei" panose="020B0604030504040204" pitchFamily="34" charset="-120"/>
               </a:rPr>
-              <a:t> </a:t>
-            </a:r>
-            <a:r>
-              <a:rPr lang="en-US" sz="3200" b="1" dirty="0">
-                <a:solidFill>
-                  <a:srgbClr val="000066"/>
-                </a:solidFill>
-                <a:effectLst/>
-                <a:latin typeface="Microsoft JhengHei" panose="020B0604030504040204" pitchFamily="34" charset="-120"/>
-                <a:ea typeface="Microsoft JhengHei" panose="020B0604030504040204" pitchFamily="34" charset="-120"/>
-              </a:rPr>
-              <a:t>)</a:t>
+              <a:t> )</a:t>
             </a:r>
             <a:endParaRPr lang="vi-VN" sz="3200" b="1" dirty="0">
               <a:solidFill>
